--- a/docs/competition/IndusOpt-A14-答辩.pptx
+++ b/docs/competition/IndusOpt-A14-答辩.pptx
@@ -3104,7 +3104,7 @@
                 <a:ea typeface="Microsoft YaHei" pitchFamily="34" charset="-122"/>
                 <a:cs typeface="Microsoft YaHei" pitchFamily="34" charset="-120"/>
               </a:rPr>
-              <a:t>233</a:t>
+              <a:t>237</a:t>
             </a:r>
             <a:endParaRPr lang="en-US" sz="3400" dirty="0"/>
           </a:p>
@@ -3424,7 +3424,7 @@
                 <a:ea typeface="Microsoft YaHei" pitchFamily="34" charset="-122"/>
                 <a:cs typeface="Microsoft YaHei" pitchFamily="34" charset="-120"/>
               </a:rPr>
-              <a:t>233</a:t>
+              <a:t>237</a:t>
             </a:r>
             <a:endParaRPr lang="en-US" sz="4000" dirty="0"/>
           </a:p>
